--- a/test-corpus/word-verification/class-diagram.pptx
+++ b/test-corpus/word-verification/class-diagram.pptx
@@ -144,13 +144,13 @@
         </p:nvCxnSpPr>
         <p:spPr>
           <a:xfrm flipV="1">
-            <a:off x="7348440" y="2363361"/>
-            <a:ext cx="1102777" cy="384114"/>
+            <a:off x="5012190" y="2595176"/>
+            <a:ext cx="913608" cy="318223"/>
           </a:xfrm>
           <a:prstGeom prst="line">
             <a:avLst/>
           </a:prstGeom>
-          <a:ln w="15754">
+          <a:ln w="13052">
             <a:solidFill>
               <a:srgbClr val="2F5496"/>
             </a:solidFill>
@@ -167,13 +167,13 @@
         </p:nvCxnSpPr>
         <p:spPr>
           <a:xfrm>
-            <a:off x="7348440" y="3405955"/>
-            <a:ext cx="1150039" cy="400576"/>
+            <a:off x="5012190" y="3458925"/>
+            <a:ext cx="952763" cy="331861"/>
           </a:xfrm>
           <a:prstGeom prst="line">
             <a:avLst/>
           </a:prstGeom>
-          <a:ln w="15754">
+          <a:ln w="13052">
             <a:solidFill>
               <a:srgbClr val="2F5496"/>
             </a:solidFill>
@@ -190,13 +190,13 @@
         </p:nvCxnSpPr>
         <p:spPr>
           <a:xfrm flipV="1">
-            <a:off x="4355188" y="3426094"/>
-            <a:ext cx="1102777" cy="407608"/>
+            <a:off x="2532396" y="3475609"/>
+            <a:ext cx="913608" cy="337688"/>
           </a:xfrm>
           <a:prstGeom prst="line">
             <a:avLst/>
           </a:prstGeom>
-          <a:ln w="15754">
+          <a:ln w="13052">
             <a:solidFill>
               <a:srgbClr val="2F5496"/>
             </a:solidFill>
@@ -213,8 +213,8 @@
         </p:nvSpPr>
         <p:spPr>
           <a:xfrm>
-            <a:off x="4660814" y="3472358"/>
-            <a:ext cx="491524" cy="315079"/>
+            <a:off x="2785596" y="3513938"/>
+            <a:ext cx="407208" cy="261031"/>
           </a:xfrm>
           <a:prstGeom prst="rect">
             <a:avLst/>
@@ -237,7 +237,7 @@
               </a:spcAft>
             </a:pPr>
             <a:r>
-              <a:rPr lang="en-US" sz="1323" dirty="0">
+              <a:rPr lang="en-US" sz="1096" dirty="0">
                 <a:solidFill>
                   <a:srgbClr val="000000"/>
                 </a:solidFill>
@@ -255,13 +255,13 @@
         </p:nvCxnSpPr>
         <p:spPr>
           <a:xfrm>
-            <a:off x="4355188" y="4619805"/>
-            <a:ext cx="1244563" cy="460016"/>
+            <a:off x="2532396" y="4464554"/>
+            <a:ext cx="1031072" cy="381105"/>
           </a:xfrm>
           <a:prstGeom prst="line">
             <a:avLst/>
           </a:prstGeom>
-          <a:ln w="15754">
+          <a:ln w="13052">
             <a:solidFill>
               <a:srgbClr val="2F5496"/>
             </a:solidFill>
@@ -278,8 +278,8 @@
         </p:nvSpPr>
         <p:spPr>
           <a:xfrm>
-            <a:off x="4769516" y="4692274"/>
-            <a:ext cx="415905" cy="315079"/>
+            <a:off x="2875651" y="4524591"/>
+            <a:ext cx="344561" cy="261031"/>
           </a:xfrm>
           <a:prstGeom prst="rect">
             <a:avLst/>
@@ -302,7 +302,7 @@
               </a:spcAft>
             </a:pPr>
             <a:r>
-              <a:rPr lang="en-US" sz="1323" dirty="0">
+              <a:rPr lang="en-US" sz="1096" dirty="0">
                 <a:solidFill>
                   <a:srgbClr val="000000"/>
                 </a:solidFill>
@@ -320,8 +320,8 @@
         </p:nvSpPr>
         <p:spPr>
           <a:xfrm>
-            <a:off x="5457965" y="2210247"/>
-            <a:ext cx="1890475" cy="1732935"/>
+            <a:off x="3446004" y="2468327"/>
+            <a:ext cx="1566186" cy="1435670"/>
           </a:xfrm>
           <a:prstGeom prst="rect">
             <a:avLst/>
@@ -329,7 +329,7 @@
           <a:solidFill>
             <a:srgbClr val="FFFFFF"/>
           </a:solidFill>
-          <a:ln w="15754">
+          <a:ln w="13052">
             <a:solidFill>
               <a:srgbClr val="2F5496"/>
             </a:solidFill>
@@ -344,8 +344,8 @@
         </p:nvSpPr>
         <p:spPr>
           <a:xfrm>
-            <a:off x="5457965" y="2210247"/>
-            <a:ext cx="1890475" cy="504127"/>
+            <a:off x="3446004" y="2468327"/>
+            <a:ext cx="1566186" cy="417650"/>
           </a:xfrm>
           <a:prstGeom prst="rect">
             <a:avLst/>
@@ -366,8 +366,8 @@
         </p:nvSpPr>
         <p:spPr>
           <a:xfrm>
-            <a:off x="5457965" y="2706496"/>
-            <a:ext cx="1890475" cy="15754"/>
+            <a:off x="3446004" y="2879450"/>
+            <a:ext cx="1566186" cy="13052"/>
           </a:xfrm>
           <a:prstGeom prst="rect">
             <a:avLst/>
@@ -388,8 +388,8 @@
         </p:nvSpPr>
         <p:spPr>
           <a:xfrm>
-            <a:off x="5457965" y="3494194"/>
-            <a:ext cx="1890475" cy="15754"/>
+            <a:off x="3446004" y="3532028"/>
+            <a:ext cx="1566186" cy="13052"/>
           </a:xfrm>
           <a:prstGeom prst="rect">
             <a:avLst/>
@@ -410,8 +410,8 @@
         </p:nvSpPr>
         <p:spPr>
           <a:xfrm>
-            <a:off x="5457965" y="2210247"/>
-            <a:ext cx="1890475" cy="504127"/>
+            <a:off x="3446004" y="2468327"/>
+            <a:ext cx="1566186" cy="417650"/>
           </a:xfrm>
           <a:prstGeom prst="rect">
             <a:avLst/>
@@ -434,7 +434,7 @@
               </a:spcAft>
             </a:pPr>
             <a:r>
-              <a:rPr lang="en-US" b="1" sz="1819" dirty="0">
+              <a:rPr lang="en-US" b="1" sz="1507" dirty="0">
                 <a:solidFill>
                   <a:srgbClr val="000000"/>
                 </a:solidFill>
@@ -452,8 +452,8 @@
         </p:nvSpPr>
         <p:spPr>
           <a:xfrm>
-            <a:off x="5615504" y="2714374"/>
-            <a:ext cx="1575396" cy="787698"/>
+            <a:off x="3576520" y="2885977"/>
+            <a:ext cx="1305155" cy="652577"/>
           </a:xfrm>
           <a:prstGeom prst="rect">
             <a:avLst/>
@@ -476,7 +476,7 @@
               </a:spcAft>
             </a:pPr>
             <a:r>
-              <a:rPr lang="en-US" sz="1489" dirty="0">
+              <a:rPr lang="en-US" sz="1233" dirty="0">
                 <a:solidFill>
                   <a:srgbClr val="000000"/>
                 </a:solidFill>
@@ -494,7 +494,7 @@
               </a:spcAft>
             </a:pPr>
             <a:r>
-              <a:rPr lang="en-US" sz="1489" dirty="0">
+              <a:rPr lang="en-US" sz="1233" dirty="0">
                 <a:solidFill>
                   <a:srgbClr val="000000"/>
                 </a:solidFill>
@@ -512,8 +512,8 @@
         </p:nvSpPr>
         <p:spPr>
           <a:xfrm>
-            <a:off x="5615504" y="3502072"/>
-            <a:ext cx="1575396" cy="441111"/>
+            <a:off x="3576520" y="3538554"/>
+            <a:ext cx="1305155" cy="365443"/>
           </a:xfrm>
           <a:prstGeom prst="rect">
             <a:avLst/>
@@ -536,7 +536,7 @@
               </a:spcAft>
             </a:pPr>
             <a:r>
-              <a:rPr lang="en-US" sz="1489" dirty="0">
+              <a:rPr lang="en-US" sz="1233" dirty="0">
                 <a:solidFill>
                   <a:srgbClr val="000000"/>
                 </a:solidFill>
@@ -554,8 +554,8 @@
         </p:nvSpPr>
         <p:spPr>
           <a:xfrm>
-            <a:off x="8451217" y="1406795"/>
-            <a:ext cx="1512380" cy="1386348"/>
+            <a:off x="5925798" y="1802698"/>
+            <a:ext cx="1252949" cy="1148536"/>
           </a:xfrm>
           <a:prstGeom prst="rect">
             <a:avLst/>
@@ -563,7 +563,7 @@
           <a:solidFill>
             <a:srgbClr val="FFFFFF"/>
           </a:solidFill>
-          <a:ln w="15754">
+          <a:ln w="13052">
             <a:solidFill>
               <a:srgbClr val="2F5496"/>
             </a:solidFill>
@@ -578,8 +578,8 @@
         </p:nvSpPr>
         <p:spPr>
           <a:xfrm>
-            <a:off x="8451217" y="1406795"/>
-            <a:ext cx="1512380" cy="504127"/>
+            <a:off x="5925798" y="1802698"/>
+            <a:ext cx="1252949" cy="417650"/>
           </a:xfrm>
           <a:prstGeom prst="rect">
             <a:avLst/>
@@ -600,8 +600,8 @@
         </p:nvSpPr>
         <p:spPr>
           <a:xfrm>
-            <a:off x="8451217" y="1903044"/>
-            <a:ext cx="1512380" cy="15754"/>
+            <a:off x="5925798" y="2213821"/>
+            <a:ext cx="1252949" cy="13052"/>
           </a:xfrm>
           <a:prstGeom prst="rect">
             <a:avLst/>
@@ -622,8 +622,8 @@
         </p:nvSpPr>
         <p:spPr>
           <a:xfrm>
-            <a:off x="8451217" y="2344155"/>
-            <a:ext cx="1512380" cy="15754"/>
+            <a:off x="5925798" y="2579265"/>
+            <a:ext cx="1252949" cy="13052"/>
           </a:xfrm>
           <a:prstGeom prst="rect">
             <a:avLst/>
@@ -644,8 +644,8 @@
         </p:nvSpPr>
         <p:spPr>
           <a:xfrm>
-            <a:off x="8451217" y="1406795"/>
-            <a:ext cx="1512380" cy="504127"/>
+            <a:off x="5925798" y="1802698"/>
+            <a:ext cx="1252949" cy="417650"/>
           </a:xfrm>
           <a:prstGeom prst="rect">
             <a:avLst/>
@@ -668,7 +668,7 @@
               </a:spcAft>
             </a:pPr>
             <a:r>
-              <a:rPr lang="en-US" b="1" sz="1819" dirty="0">
+              <a:rPr lang="en-US" b="1" sz="1507" dirty="0">
                 <a:solidFill>
                   <a:srgbClr val="000000"/>
                 </a:solidFill>
@@ -686,8 +686,8 @@
         </p:nvSpPr>
         <p:spPr>
           <a:xfrm>
-            <a:off x="8608756" y="1910922"/>
-            <a:ext cx="1197301" cy="441111"/>
+            <a:off x="6056314" y="2220348"/>
+            <a:ext cx="991918" cy="365443"/>
           </a:xfrm>
           <a:prstGeom prst="rect">
             <a:avLst/>
@@ -710,7 +710,7 @@
               </a:spcAft>
             </a:pPr>
             <a:r>
-              <a:rPr lang="en-US" sz="1489" dirty="0">
+              <a:rPr lang="en-US" sz="1233" dirty="0">
                 <a:solidFill>
                   <a:srgbClr val="000000"/>
                 </a:solidFill>
@@ -728,8 +728,8 @@
         </p:nvSpPr>
         <p:spPr>
           <a:xfrm>
-            <a:off x="8608756" y="2352033"/>
-            <a:ext cx="1197301" cy="441111"/>
+            <a:off x="6056314" y="2585791"/>
+            <a:ext cx="991918" cy="365443"/>
           </a:xfrm>
           <a:prstGeom prst="rect">
             <a:avLst/>
@@ -752,7 +752,7 @@
               </a:spcAft>
             </a:pPr>
             <a:r>
-              <a:rPr lang="en-US" sz="1489" dirty="0">
+              <a:rPr lang="en-US" sz="1233" dirty="0">
                 <a:solidFill>
                   <a:srgbClr val="000000"/>
                 </a:solidFill>
@@ -770,8 +770,8 @@
         </p:nvSpPr>
         <p:spPr>
           <a:xfrm>
-            <a:off x="8498479" y="3580841"/>
-            <a:ext cx="1417856" cy="945238"/>
+            <a:off x="5964953" y="3603812"/>
+            <a:ext cx="1174639" cy="783093"/>
           </a:xfrm>
           <a:prstGeom prst="rect">
             <a:avLst/>
@@ -779,7 +779,7 @@
           <a:solidFill>
             <a:srgbClr val="FFFFFF"/>
           </a:solidFill>
-          <a:ln w="15754">
+          <a:ln w="13052">
             <a:solidFill>
               <a:srgbClr val="2F5496"/>
             </a:solidFill>
@@ -794,8 +794,8 @@
         </p:nvSpPr>
         <p:spPr>
           <a:xfrm>
-            <a:off x="8498479" y="3580841"/>
-            <a:ext cx="1417856" cy="504127"/>
+            <a:off x="5964953" y="3603812"/>
+            <a:ext cx="1174639" cy="417650"/>
           </a:xfrm>
           <a:prstGeom prst="rect">
             <a:avLst/>
@@ -816,8 +816,8 @@
         </p:nvSpPr>
         <p:spPr>
           <a:xfrm>
-            <a:off x="8498479" y="4077090"/>
-            <a:ext cx="1417856" cy="15754"/>
+            <a:off x="5964953" y="4014935"/>
+            <a:ext cx="1174639" cy="13052"/>
           </a:xfrm>
           <a:prstGeom prst="rect">
             <a:avLst/>
@@ -838,8 +838,8 @@
         </p:nvSpPr>
         <p:spPr>
           <a:xfrm>
-            <a:off x="8498479" y="3580841"/>
-            <a:ext cx="1417856" cy="504127"/>
+            <a:off x="5964953" y="3603812"/>
+            <a:ext cx="1174639" cy="417650"/>
           </a:xfrm>
           <a:prstGeom prst="rect">
             <a:avLst/>
@@ -862,7 +862,7 @@
               </a:spcAft>
             </a:pPr>
             <a:r>
-              <a:rPr lang="en-US" b="1" sz="1819" dirty="0">
+              <a:rPr lang="en-US" b="1" sz="1507" dirty="0">
                 <a:solidFill>
                   <a:srgbClr val="000000"/>
                 </a:solidFill>
@@ -880,8 +880,8 @@
         </p:nvSpPr>
         <p:spPr>
           <a:xfrm>
-            <a:off x="8656018" y="4084968"/>
-            <a:ext cx="1102777" cy="441111"/>
+            <a:off x="6095468" y="4021461"/>
+            <a:ext cx="913608" cy="365443"/>
           </a:xfrm>
           <a:prstGeom prst="rect">
             <a:avLst/>
@@ -904,7 +904,7 @@
               </a:spcAft>
             </a:pPr>
             <a:r>
-              <a:rPr lang="en-US" sz="1489" dirty="0">
+              <a:rPr lang="en-US" sz="1233" dirty="0">
                 <a:solidFill>
                   <a:srgbClr val="000000"/>
                 </a:solidFill>
@@ -922,8 +922,8 @@
         </p:nvSpPr>
         <p:spPr>
           <a:xfrm>
-            <a:off x="2228403" y="3533579"/>
-            <a:ext cx="2126784" cy="1386348"/>
+            <a:off x="770437" y="3564657"/>
+            <a:ext cx="1761959" cy="1148536"/>
           </a:xfrm>
           <a:prstGeom prst="rect">
             <a:avLst/>
@@ -931,7 +931,7 @@
           <a:solidFill>
             <a:srgbClr val="FFFFFF"/>
           </a:solidFill>
-          <a:ln w="15754">
+          <a:ln w="13052">
             <a:solidFill>
               <a:srgbClr val="2F5496"/>
             </a:solidFill>
@@ -946,8 +946,8 @@
         </p:nvSpPr>
         <p:spPr>
           <a:xfrm>
-            <a:off x="2228403" y="3533579"/>
-            <a:ext cx="2126784" cy="504127"/>
+            <a:off x="770437" y="3564657"/>
+            <a:ext cx="1761959" cy="417650"/>
           </a:xfrm>
           <a:prstGeom prst="rect">
             <a:avLst/>
@@ -968,8 +968,8 @@
         </p:nvSpPr>
         <p:spPr>
           <a:xfrm>
-            <a:off x="2228403" y="4029828"/>
-            <a:ext cx="2126784" cy="15754"/>
+            <a:off x="770437" y="3975780"/>
+            <a:ext cx="1761959" cy="13052"/>
           </a:xfrm>
           <a:prstGeom prst="rect">
             <a:avLst/>
@@ -990,8 +990,8 @@
         </p:nvSpPr>
         <p:spPr>
           <a:xfrm>
-            <a:off x="2228403" y="4470939"/>
-            <a:ext cx="2126784" cy="15754"/>
+            <a:off x="770437" y="4341224"/>
+            <a:ext cx="1761959" cy="13052"/>
           </a:xfrm>
           <a:prstGeom prst="rect">
             <a:avLst/>
@@ -1012,8 +1012,8 @@
         </p:nvSpPr>
         <p:spPr>
           <a:xfrm>
-            <a:off x="2228403" y="3533579"/>
-            <a:ext cx="2126784" cy="504127"/>
+            <a:off x="770437" y="3564657"/>
+            <a:ext cx="1761959" cy="417650"/>
           </a:xfrm>
           <a:prstGeom prst="rect">
             <a:avLst/>
@@ -1036,7 +1036,7 @@
               </a:spcAft>
             </a:pPr>
             <a:r>
-              <a:rPr lang="en-US" b="1" sz="1819" dirty="0">
+              <a:rPr lang="en-US" b="1" sz="1507" dirty="0">
                 <a:solidFill>
                   <a:srgbClr val="000000"/>
                 </a:solidFill>
@@ -1054,8 +1054,8 @@
         </p:nvSpPr>
         <p:spPr>
           <a:xfrm>
-            <a:off x="2385943" y="4037706"/>
-            <a:ext cx="1811705" cy="441111"/>
+            <a:off x="900953" y="3982307"/>
+            <a:ext cx="1500928" cy="365443"/>
           </a:xfrm>
           <a:prstGeom prst="rect">
             <a:avLst/>
@@ -1078,7 +1078,7 @@
               </a:spcAft>
             </a:pPr>
             <a:r>
-              <a:rPr lang="en-US" sz="1489" dirty="0">
+              <a:rPr lang="en-US" sz="1233" dirty="0">
                 <a:solidFill>
                   <a:srgbClr val="000000"/>
                 </a:solidFill>
@@ -1096,8 +1096,8 @@
         </p:nvSpPr>
         <p:spPr>
           <a:xfrm>
-            <a:off x="2385943" y="4478817"/>
-            <a:ext cx="1811705" cy="441111"/>
+            <a:off x="900953" y="4347750"/>
+            <a:ext cx="1500928" cy="365443"/>
           </a:xfrm>
           <a:prstGeom prst="rect">
             <a:avLst/>
@@ -1120,7 +1120,7 @@
               </a:spcAft>
             </a:pPr>
             <a:r>
-              <a:rPr lang="en-US" sz="1489" dirty="0">
+              <a:rPr lang="en-US" sz="1233" dirty="0">
                 <a:solidFill>
                   <a:srgbClr val="000000"/>
                 </a:solidFill>
@@ -1138,8 +1138,8 @@
         </p:nvSpPr>
         <p:spPr>
           <a:xfrm>
-            <a:off x="5599750" y="4730880"/>
-            <a:ext cx="1606904" cy="1291825"/>
+            <a:off x="3563468" y="4556575"/>
+            <a:ext cx="1331258" cy="1070227"/>
           </a:xfrm>
           <a:prstGeom prst="rect">
             <a:avLst/>
@@ -1147,7 +1147,7 @@
           <a:solidFill>
             <a:srgbClr val="FFFFFF"/>
           </a:solidFill>
-          <a:ln w="15754">
+          <a:ln w="13052">
             <a:solidFill>
               <a:srgbClr val="2F5496"/>
             </a:solidFill>
@@ -1162,8 +1162,8 @@
         </p:nvSpPr>
         <p:spPr>
           <a:xfrm>
-            <a:off x="5599750" y="4730880"/>
-            <a:ext cx="1606904" cy="504127"/>
+            <a:off x="3563468" y="4556575"/>
+            <a:ext cx="1331258" cy="417650"/>
           </a:xfrm>
           <a:prstGeom prst="rect">
             <a:avLst/>
@@ -1184,8 +1184,8 @@
         </p:nvSpPr>
         <p:spPr>
           <a:xfrm>
-            <a:off x="5599750" y="5227129"/>
-            <a:ext cx="1606904" cy="15754"/>
+            <a:off x="3563468" y="4967698"/>
+            <a:ext cx="1331258" cy="13052"/>
           </a:xfrm>
           <a:prstGeom prst="rect">
             <a:avLst/>
@@ -1206,8 +1206,8 @@
         </p:nvSpPr>
         <p:spPr>
           <a:xfrm>
-            <a:off x="5599750" y="4730880"/>
-            <a:ext cx="1606904" cy="504127"/>
+            <a:off x="3563468" y="4556575"/>
+            <a:ext cx="1331258" cy="417650"/>
           </a:xfrm>
           <a:prstGeom prst="rect">
             <a:avLst/>
@@ -1230,7 +1230,7 @@
               </a:spcAft>
             </a:pPr>
             <a:r>
-              <a:rPr lang="en-US" b="1" sz="1819" dirty="0">
+              <a:rPr lang="en-US" b="1" sz="1507" dirty="0">
                 <a:solidFill>
                   <a:srgbClr val="000000"/>
                 </a:solidFill>
@@ -1248,8 +1248,8 @@
         </p:nvSpPr>
         <p:spPr>
           <a:xfrm>
-            <a:off x="5757290" y="5235007"/>
-            <a:ext cx="1291825" cy="787698"/>
+            <a:off x="3693984" y="4974224"/>
+            <a:ext cx="1070227" cy="652577"/>
           </a:xfrm>
           <a:prstGeom prst="rect">
             <a:avLst/>
@@ -1272,7 +1272,7 @@
               </a:spcAft>
             </a:pPr>
             <a:r>
-              <a:rPr lang="en-US" sz="1489" dirty="0">
+              <a:rPr lang="en-US" sz="1233" dirty="0">
                 <a:solidFill>
                   <a:srgbClr val="000000"/>
                 </a:solidFill>
@@ -1290,12 +1290,380 @@
               </a:spcAft>
             </a:pPr>
             <a:r>
-              <a:rPr lang="en-US" sz="1489" dirty="0">
+              <a:rPr lang="en-US" sz="1233" dirty="0">
                 <a:solidFill>
                   <a:srgbClr val="000000"/>
                 </a:solidFill>
               </a:rPr>
               <a:t>+String city</a:t>
+            </a:r>
+          </a:p>
+        </p:txBody>
+      </p:sp>
+      <p:sp>
+        <p:nvSpPr>
+          <p:cNvPr id="4" name="Mermaid source"/>
+          <p:cNvSpPr/>
+          <p:nvPr/>
+        </p:nvSpPr>
+        <p:spPr>
+          <a:xfrm>
+            <a:off x="7674864" y="1028700"/>
+            <a:ext cx="4059936" cy="5372100"/>
+          </a:xfrm>
+          <a:prstGeom prst="rect">
+            <a:avLst/>
+          </a:prstGeom>
+          <a:solidFill>
+            <a:srgbClr val="F3F4F6"/>
+          </a:solidFill>
+          <a:ln w="9525">
+            <a:solidFill>
+              <a:srgbClr val="D1D5DB"/>
+            </a:solidFill>
+          </a:ln>
+        </p:spPr>
+        <p:txBody>
+          <a:bodyPr wrap="square" lIns="91440" tIns="45720" rIns="91440" bIns="45720" anchor="t">
+            <a:noAutofit/>
+          </a:bodyPr>
+          <a:lstStyle/>
+          <a:p>
+            <a:pPr algn="l"/>
+            <a:r>
+              <a:rPr lang="en-US" sz="1250" dirty="0">
+                <a:solidFill>
+                  <a:srgbClr val="1F2937"/>
+                </a:solidFill>
+                <a:latin typeface="Consolas"/>
+                <a:cs typeface="Consolas"/>
+              </a:rPr>
+              <a:t>classDiagram</a:t>
+            </a:r>
+          </a:p>
+          <a:p>
+            <a:pPr algn="l"/>
+            <a:r>
+              <a:rPr lang="en-US" sz="1250" dirty="0">
+                <a:solidFill>
+                  <a:srgbClr val="1F2937"/>
+                </a:solidFill>
+                <a:latin typeface="Consolas"/>
+                <a:cs typeface="Consolas"/>
+              </a:rPr>
+              <a:t>  direction LR</a:t>
+            </a:r>
+          </a:p>
+          <a:p>
+            <a:pPr algn="l"/>
+            <a:r>
+              <a:rPr lang="en-US" sz="1250" dirty="0">
+                <a:solidFill>
+                  <a:srgbClr val="1F2937"/>
+                </a:solidFill>
+                <a:latin typeface="Consolas"/>
+                <a:cs typeface="Consolas"/>
+              </a:rPr>
+              <a:t>  class Animal {</a:t>
+            </a:r>
+          </a:p>
+          <a:p>
+            <a:pPr algn="l"/>
+            <a:r>
+              <a:rPr lang="en-US" sz="1250" dirty="0">
+                <a:solidFill>
+                  <a:srgbClr val="1F2937"/>
+                </a:solidFill>
+                <a:latin typeface="Consolas"/>
+                <a:cs typeface="Consolas"/>
+              </a:rPr>
+              <a:t>    +String name</a:t>
+            </a:r>
+          </a:p>
+          <a:p>
+            <a:pPr algn="l"/>
+            <a:r>
+              <a:rPr lang="en-US" sz="1250" dirty="0">
+                <a:solidFill>
+                  <a:srgbClr val="1F2937"/>
+                </a:solidFill>
+                <a:latin typeface="Consolas"/>
+                <a:cs typeface="Consolas"/>
+              </a:rPr>
+              <a:t>    +int age</a:t>
+            </a:r>
+          </a:p>
+          <a:p>
+            <a:pPr algn="l"/>
+            <a:r>
+              <a:rPr lang="en-US" sz="1250" dirty="0">
+                <a:solidFill>
+                  <a:srgbClr val="1F2937"/>
+                </a:solidFill>
+                <a:latin typeface="Consolas"/>
+                <a:cs typeface="Consolas"/>
+              </a:rPr>
+              <a:t>    +makeSound() void</a:t>
+            </a:r>
+          </a:p>
+          <a:p>
+            <a:pPr algn="l"/>
+            <a:r>
+              <a:rPr lang="en-US" sz="1250" dirty="0">
+                <a:solidFill>
+                  <a:srgbClr val="1F2937"/>
+                </a:solidFill>
+                <a:latin typeface="Consolas"/>
+                <a:cs typeface="Consolas"/>
+              </a:rPr>
+              <a:t>  }</a:t>
+            </a:r>
+          </a:p>
+          <a:p>
+            <a:pPr algn="l"/>
+            <a:r>
+              <a:rPr lang="en-US" sz="1250" dirty="0">
+                <a:solidFill>
+                  <a:srgbClr val="1F2937"/>
+                </a:solidFill>
+                <a:latin typeface="Consolas"/>
+                <a:cs typeface="Consolas"/>
+              </a:rPr>
+              <a:t>  class Dog {</a:t>
+            </a:r>
+          </a:p>
+          <a:p>
+            <a:pPr algn="l"/>
+            <a:r>
+              <a:rPr lang="en-US" sz="1250" dirty="0">
+                <a:solidFill>
+                  <a:srgbClr val="1F2937"/>
+                </a:solidFill>
+                <a:latin typeface="Consolas"/>
+                <a:cs typeface="Consolas"/>
+              </a:rPr>
+              <a:t>    +String breed</a:t>
+            </a:r>
+          </a:p>
+          <a:p>
+            <a:pPr algn="l"/>
+            <a:r>
+              <a:rPr lang="en-US" sz="1250" dirty="0">
+                <a:solidFill>
+                  <a:srgbClr val="1F2937"/>
+                </a:solidFill>
+                <a:latin typeface="Consolas"/>
+                <a:cs typeface="Consolas"/>
+              </a:rPr>
+              <a:t>    +bark() void</a:t>
+            </a:r>
+          </a:p>
+          <a:p>
+            <a:pPr algn="l"/>
+            <a:r>
+              <a:rPr lang="en-US" sz="1250" dirty="0">
+                <a:solidFill>
+                  <a:srgbClr val="1F2937"/>
+                </a:solidFill>
+                <a:latin typeface="Consolas"/>
+                <a:cs typeface="Consolas"/>
+              </a:rPr>
+              <a:t>  }</a:t>
+            </a:r>
+          </a:p>
+          <a:p>
+            <a:pPr algn="l"/>
+            <a:r>
+              <a:rPr lang="en-US" sz="1250" dirty="0">
+                <a:solidFill>
+                  <a:srgbClr val="1F2937"/>
+                </a:solidFill>
+                <a:latin typeface="Consolas"/>
+                <a:cs typeface="Consolas"/>
+              </a:rPr>
+              <a:t>  class Cat {</a:t>
+            </a:r>
+          </a:p>
+          <a:p>
+            <a:pPr algn="l"/>
+            <a:r>
+              <a:rPr lang="en-US" sz="1250" dirty="0">
+                <a:solidFill>
+                  <a:srgbClr val="1F2937"/>
+                </a:solidFill>
+                <a:latin typeface="Consolas"/>
+                <a:cs typeface="Consolas"/>
+              </a:rPr>
+              <a:t>    +bark() void</a:t>
+            </a:r>
+          </a:p>
+          <a:p>
+            <a:pPr algn="l"/>
+            <a:r>
+              <a:rPr lang="en-US" sz="1250" dirty="0">
+                <a:solidFill>
+                  <a:srgbClr val="1F2937"/>
+                </a:solidFill>
+                <a:latin typeface="Consolas"/>
+                <a:cs typeface="Consolas"/>
+              </a:rPr>
+              <a:t>  }</a:t>
+            </a:r>
+          </a:p>
+          <a:p>
+            <a:pPr algn="l"/>
+            <a:r>
+              <a:rPr lang="en-US" sz="1250" dirty="0">
+                <a:solidFill>
+                  <a:srgbClr val="1F2937"/>
+                </a:solidFill>
+                <a:latin typeface="Consolas"/>
+                <a:cs typeface="Consolas"/>
+              </a:rPr>
+              <a:t>  class Owner {</a:t>
+            </a:r>
+          </a:p>
+          <a:p>
+            <a:pPr algn="l"/>
+            <a:r>
+              <a:rPr lang="en-US" sz="1250" dirty="0">
+                <a:solidFill>
+                  <a:srgbClr val="1F2937"/>
+                </a:solidFill>
+                <a:latin typeface="Consolas"/>
+                <a:cs typeface="Consolas"/>
+              </a:rPr>
+              <a:t>    +String name</a:t>
+            </a:r>
+          </a:p>
+          <a:p>
+            <a:pPr algn="l"/>
+            <a:r>
+              <a:rPr lang="en-US" sz="1250" dirty="0">
+                <a:solidFill>
+                  <a:srgbClr val="1F2937"/>
+                </a:solidFill>
+                <a:latin typeface="Consolas"/>
+                <a:cs typeface="Consolas"/>
+              </a:rPr>
+              <a:t>    +feed(Animal a) void</a:t>
+            </a:r>
+          </a:p>
+          <a:p>
+            <a:pPr algn="l"/>
+            <a:r>
+              <a:rPr lang="en-US" sz="1250" dirty="0">
+                <a:solidFill>
+                  <a:srgbClr val="1F2937"/>
+                </a:solidFill>
+                <a:latin typeface="Consolas"/>
+                <a:cs typeface="Consolas"/>
+              </a:rPr>
+              <a:t>  }</a:t>
+            </a:r>
+          </a:p>
+          <a:p>
+            <a:pPr algn="l"/>
+            <a:r>
+              <a:rPr lang="en-US" sz="1250" dirty="0">
+                <a:solidFill>
+                  <a:srgbClr val="1F2937"/>
+                </a:solidFill>
+                <a:latin typeface="Consolas"/>
+                <a:cs typeface="Consolas"/>
+              </a:rPr>
+              <a:t>  Animal &lt;|-- Dog</a:t>
+            </a:r>
+          </a:p>
+          <a:p>
+            <a:pPr algn="l"/>
+            <a:r>
+              <a:rPr lang="en-US" sz="1250" dirty="0">
+                <a:solidFill>
+                  <a:srgbClr val="1F2937"/>
+                </a:solidFill>
+                <a:latin typeface="Consolas"/>
+                <a:cs typeface="Consolas"/>
+              </a:rPr>
+              <a:t>  Animal &lt;|-- Cat</a:t>
+            </a:r>
+          </a:p>
+          <a:p>
+            <a:pPr algn="l"/>
+            <a:r>
+              <a:rPr lang="en-US" sz="1250" dirty="0">
+                <a:solidFill>
+                  <a:srgbClr val="1F2937"/>
+                </a:solidFill>
+                <a:latin typeface="Consolas"/>
+                <a:cs typeface="Consolas"/>
+              </a:rPr>
+              <a:t>  Owner "1" --&gt; "many" Animal : owns</a:t>
+            </a:r>
+          </a:p>
+          <a:p>
+            <a:pPr algn="l"/>
+            <a:r>
+              <a:rPr lang="en-US" sz="1250" dirty="0">
+                <a:solidFill>
+                  <a:srgbClr val="1F2937"/>
+                </a:solidFill>
+                <a:latin typeface="Consolas"/>
+                <a:cs typeface="Consolas"/>
+              </a:rPr>
+              <a:t>  Owner *-- Address : has</a:t>
+            </a:r>
+          </a:p>
+          <a:p>
+            <a:pPr algn="l"/>
+            <a:r>
+              <a:rPr lang="en-US" sz="1250" dirty="0">
+                <a:solidFill>
+                  <a:srgbClr val="1F2937"/>
+                </a:solidFill>
+                <a:latin typeface="Consolas"/>
+                <a:cs typeface="Consolas"/>
+              </a:rPr>
+              <a:t>  class Address {</a:t>
+            </a:r>
+          </a:p>
+          <a:p>
+            <a:pPr algn="l"/>
+            <a:r>
+              <a:rPr lang="en-US" sz="1250" dirty="0">
+                <a:solidFill>
+                  <a:srgbClr val="1F2937"/>
+                </a:solidFill>
+                <a:latin typeface="Consolas"/>
+                <a:cs typeface="Consolas"/>
+              </a:rPr>
+              <a:t>    +String street</a:t>
+            </a:r>
+          </a:p>
+          <a:p>
+            <a:pPr algn="l"/>
+            <a:r>
+              <a:rPr lang="en-US" sz="1250" dirty="0">
+                <a:solidFill>
+                  <a:srgbClr val="1F2937"/>
+                </a:solidFill>
+                <a:latin typeface="Consolas"/>
+                <a:cs typeface="Consolas"/>
+              </a:rPr>
+              <a:t>    +String city</a:t>
+            </a:r>
+          </a:p>
+          <a:p>
+            <a:pPr algn="l"/>
+            <a:r>
+              <a:rPr lang="en-US" sz="1250" dirty="0">
+                <a:solidFill>
+                  <a:srgbClr val="1F2937"/>
+                </a:solidFill>
+                <a:latin typeface="Consolas"/>
+                <a:cs typeface="Consolas"/>
+              </a:rPr>
+              <a:t>  }</a:t>
             </a:r>
           </a:p>
         </p:txBody>
